--- a/reports/presentation/NPS_Preditivo_Apresentacao.pptx
+++ b/reports/presentation/NPS_Preditivo_Apresentacao.pptx
@@ -9136,7 +9136,23 @@
                   <a:srgbClr val="444444"/>
                 </a:solidFill>
               </a:rPr>
-              <a:t>▶  Prazo de 8 dias de entrega é um absurdo, concorrências oferecem serviços de 1 ou 2 dias de entrega.</a:t>
+              <a:t>▶  Prazo de 8 dias de entrega é um absurdo, </a:t>
+            </a:r>
+            <a:r>
+              <a:rPr lang="pt-BR" sz="1300" dirty="0" err="1">
+                <a:solidFill>
+                  <a:srgbClr val="444444"/>
+                </a:solidFill>
+              </a:rPr>
+              <a:t>concorrêntes</a:t>
+            </a:r>
+            <a:r>
+              <a:rPr lang="pt-BR" sz="1300" dirty="0">
+                <a:solidFill>
+                  <a:srgbClr val="444444"/>
+                </a:solidFill>
+              </a:rPr>
+              <a:t> oferecem serviços de 1 ou 2 dias de entrega.</a:t>
             </a:r>
             <a:endParaRPr sz="1300" b="0" i="0" dirty="0">
               <a:solidFill>
@@ -9796,7 +9812,7 @@
                   <a:srgbClr val="444444"/>
                 </a:solidFill>
               </a:rPr>
-              <a:t>▶  Acompanhamento de avaliações externas, Reclame Aqui!, Procon, Google Avaliações, etc.</a:t>
+              <a:t>▶  Acompanhamento de avaliações externas, Reclame Aqui, Procon, Google Avaliações, etc.</a:t>
             </a:r>
           </a:p>
           <a:p>
@@ -10836,7 +10852,7 @@
                   <a:srgbClr val="444444"/>
                 </a:solidFill>
               </a:rPr>
-              <a:t>Revisão de composição do nota de avaliação.</a:t>
+              <a:t>Revisão de composição da nota de avaliação.</a:t>
             </a:r>
           </a:p>
         </p:txBody>
@@ -16726,13 +16742,25 @@
               </a:rPr>
               <a:t>6</a:t>
             </a:r>
+            <a:endParaRPr lang="pt-BR" sz="1600" dirty="0">
+              <a:solidFill>
+                <a:srgbClr val="444444"/>
+              </a:solidFill>
+            </a:endParaRPr>
+          </a:p>
+          <a:p>
+            <a:pPr>
+              <a:spcBef>
+                <a:spcPts val="700"/>
+              </a:spcBef>
+            </a:pPr>
             <a:r>
               <a:rPr sz="1600" b="0" i="0" dirty="0">
                 <a:solidFill>
                   <a:srgbClr val="444444"/>
                 </a:solidFill>
               </a:rPr>
-              <a:t> — </a:t>
+              <a:t>⚠️  1 a 2 </a:t>
             </a:r>
             <a:r>
               <a:rPr sz="1600" b="0" i="0" dirty="0" err="1">
@@ -16740,7 +16768,7 @@
                   <a:srgbClr val="444444"/>
                 </a:solidFill>
               </a:rPr>
-              <a:t>melhor</a:t>
+              <a:t>dias</a:t>
             </a:r>
             <a:r>
               <a:rPr sz="1600" b="0" i="0" dirty="0">
@@ -16748,7 +16776,7 @@
                   <a:srgbClr val="444444"/>
                 </a:solidFill>
               </a:rPr>
-              <a:t> </a:t>
+              <a:t>: </a:t>
             </a:r>
             <a:r>
               <a:rPr sz="1600" b="0" i="0" dirty="0" err="1">
@@ -16756,7 +16784,39 @@
                   <a:srgbClr val="444444"/>
                 </a:solidFill>
               </a:rPr>
-              <a:t>grupo</a:t>
+              <a:t>queda</a:t>
+            </a:r>
+            <a:r>
+              <a:rPr sz="1600" b="0" i="0" dirty="0">
+                <a:solidFill>
+                  <a:srgbClr val="444444"/>
+                </a:solidFill>
+              </a:rPr>
+              <a:t> de </a:t>
+            </a:r>
+            <a:r>
+              <a:rPr lang="pt-BR" sz="1600" dirty="0">
+                <a:solidFill>
+                  <a:srgbClr val="444444"/>
+                </a:solidFill>
+              </a:rPr>
+              <a:t>2</a:t>
+            </a:r>
+            <a:r>
+              <a:rPr sz="1600" b="0" i="0" dirty="0">
+                <a:solidFill>
+                  <a:srgbClr val="444444"/>
+                </a:solidFill>
+              </a:rPr>
+              <a:t>6% </a:t>
+            </a:r>
+            <a:r>
+              <a:rPr lang="pt-BR" sz="1600" b="0" i="0" dirty="0">
+                <a:solidFill>
+                  <a:srgbClr val="444444"/>
+                </a:solidFill>
+              </a:rPr>
+              <a:t>nas notas</a:t>
             </a:r>
             <a:endParaRPr sz="1600" b="0" i="0" dirty="0">
               <a:solidFill>
@@ -16776,7 +16836,7 @@
                   <a:srgbClr val="444444"/>
                 </a:solidFill>
               </a:rPr>
-              <a:t>⚠️  1 a 2 </a:t>
+              <a:t>🔴  3 a 4 </a:t>
             </a:r>
             <a:r>
               <a:rPr sz="1600" b="0" i="0" dirty="0" err="1">
@@ -16808,7 +16868,7 @@
                   <a:srgbClr val="444444"/>
                 </a:solidFill>
               </a:rPr>
-              <a:t> de 16% </a:t>
+              <a:t> de </a:t>
             </a:r>
             <a:r>
               <a:rPr lang="pt-BR" sz="1600" b="0" i="0" dirty="0">
@@ -16816,59 +16876,15 @@
                   <a:srgbClr val="444444"/>
                 </a:solidFill>
               </a:rPr>
-              <a:t>nas notas</a:t>
-            </a:r>
-            <a:endParaRPr sz="1600" b="0" i="0" dirty="0">
-              <a:solidFill>
-                <a:srgbClr val="444444"/>
-              </a:solidFill>
-            </a:endParaRPr>
-          </a:p>
-          <a:p>
-            <a:pPr algn="l">
-              <a:spcBef>
-                <a:spcPts val="700"/>
-              </a:spcBef>
-            </a:pPr>
+              <a:t>55</a:t>
+            </a:r>
             <a:r>
               <a:rPr sz="1600" b="0" i="0" dirty="0">
                 <a:solidFill>
                   <a:srgbClr val="444444"/>
                 </a:solidFill>
               </a:rPr>
-              <a:t>🔴  3 a 4 </a:t>
-            </a:r>
-            <a:r>
-              <a:rPr sz="1600" b="0" i="0" dirty="0" err="1">
-                <a:solidFill>
-                  <a:srgbClr val="444444"/>
-                </a:solidFill>
-              </a:rPr>
-              <a:t>dias</a:t>
-            </a:r>
-            <a:r>
-              <a:rPr sz="1600" b="0" i="0" dirty="0">
-                <a:solidFill>
-                  <a:srgbClr val="444444"/>
-                </a:solidFill>
-              </a:rPr>
-              <a:t>: </a:t>
-            </a:r>
-            <a:r>
-              <a:rPr sz="1600" b="0" i="0" dirty="0" err="1">
-                <a:solidFill>
-                  <a:srgbClr val="444444"/>
-                </a:solidFill>
-              </a:rPr>
-              <a:t>queda</a:t>
-            </a:r>
-            <a:r>
-              <a:rPr sz="1600" b="0" i="0" dirty="0">
-                <a:solidFill>
-                  <a:srgbClr val="444444"/>
-                </a:solidFill>
-              </a:rPr>
-              <a:t> de 38% — </a:t>
+              <a:t>% — </a:t>
             </a:r>
             <a:r>
               <a:rPr sz="1600" b="0" i="0" dirty="0" err="1">
@@ -21980,7 +21996,7 @@
                   </a:schemeClr>
                 </a:solidFill>
               </a:rPr>
-              <a:t>Acurácia de 92% geral, mas de 55% para promotores (dada a amostra baixa) .</a:t>
+              <a:t>Acurácia de 92% geral, mas de 55% para promotores (dada a amostra baixa).</a:t>
             </a:r>
           </a:p>
           <a:p>
